--- a/Tutorial-1/Trae基础使用教学PPT.pptx
+++ b/Tutorial-1/Trae基础使用教学PPT.pptx
@@ -16604,99 +16604,6 @@
           </a:p>
         </p:txBody>
       </p:sp>
-      <p:pic>
-        <p:nvPicPr>
-          <p:cNvPr id="20" name="Picture 20"/>
-          <p:cNvPicPr>
-            <a:picLocks noChangeAspect="1"/>
-          </p:cNvPicPr>
-          <p:nvPr/>
-        </p:nvPicPr>
-        <p:blipFill>
-          <a:blip r:embed="rId12"/>
-          <a:srcRect/>
-          <a:stretch>
-            <a:fillRect/>
-          </a:stretch>
-        </p:blipFill>
-        <p:spPr>
-          <a:xfrm>
-            <a:off x="7620000" y="1778000"/>
-            <a:ext cx="3302000" cy="3302000"/>
-          </a:xfrm>
-          <a:prstGeom prst="roundRect">
-            <a:avLst>
-              <a:gd name="adj" fmla="val 7692"/>
-            </a:avLst>
-          </a:prstGeom>
-          <a:noFill/>
-          <a:ln w="25400" cap="flat" cmpd="sng">
-            <a:solidFill>
-              <a:srgbClr val="64FFDA">
-                <a:alpha val="50000"/>
-              </a:srgbClr>
-            </a:solidFill>
-            <a:prstDash val="solid"/>
-            <a:round/>
-          </a:ln>
-          <a:effectLst>
-            <a:outerShdw blurRad="254000" dir="2700000" algn="tl" rotWithShape="0">
-              <a:srgbClr val="64FFDA">
-                <a:alpha val="30000"/>
-              </a:srgbClr>
-            </a:outerShdw>
-          </a:effectLst>
-        </p:spPr>
-      </p:pic>
-      <p:sp>
-        <p:nvSpPr>
-          <p:cNvPr id="21" name="AutoShape 21"/>
-          <p:cNvSpPr/>
-          <p:nvPr/>
-        </p:nvSpPr>
-        <p:spPr>
-          <a:xfrm>
-            <a:off x="7620000" y="5207000"/>
-            <a:ext cx="3302000" cy="381000"/>
-          </a:xfrm>
-          <a:prstGeom prst="rect">
-            <a:avLst/>
-          </a:prstGeom>
-          <a:noFill/>
-          <a:ln w="12700" cap="flat" cmpd="sng">
-            <a:noFill/>
-            <a:prstDash val="solid"/>
-            <a:round/>
-          </a:ln>
-        </p:spPr>
-        <p:txBody>
-          <a:bodyPr vert="horz" wrap="square" lIns="0" tIns="0" rIns="0" bIns="0" rtlCol="0" anchor="ctr" anchorCtr="0"/>
-          <a:lstStyle/>
-          <a:p>
-            <a:pPr indent="0" algn="ctr">
-              <a:lnSpc>
-                <a:spcPct val="125000"/>
-              </a:lnSpc>
-              <a:defRPr/>
-            </a:pPr>
-            <a:r>
-              <a:rPr lang="en-US" sz="1400" b="0" i="0" u="none" strike="noStrike">
-                <a:solidFill>
-                  <a:srgbClr val="FFFFFF">
-                    <a:alpha val="70196"/>
-                  </a:srgbClr>
-                </a:solidFill>
-                <a:latin typeface="Noto Sans SC" panose="020B0200000000000000" charset="-122"/>
-                <a:ea typeface="Noto Sans SC" panose="020B0200000000000000" charset="-122"/>
-                <a:cs typeface="Noto Sans SC" panose="020B0200000000000000" charset="-122"/>
-                <a:sym typeface="Noto Sans SC" panose="020B0200000000000000" charset="-122"/>
-              </a:rPr>
-              <a:t>操作流程示意图</a:t>
-            </a:r>
-            <a:endParaRPr lang="en-US" sz="1100"/>
-          </a:p>
-        </p:txBody>
-      </p:sp>
     </p:spTree>
   </p:cSld>
   <p:clrMapOvr>
